--- a/slides/Chapter 03 - Federalism (Lecture Deck).pptx
+++ b/slides/Chapter 03 - Federalism (Lecture Deck).pptx
@@ -2703,7 +2703,7 @@
         <p:spPr>
           <a:xfrm>
             <a:off x="850392" y="2606040"/>
-            <a:ext cx="4882896" cy="1051560"/>
+            <a:ext cx="4882896" cy="1033272"/>
           </a:xfrm>
           <a:prstGeom prst="rect">
             <a:avLst/>
@@ -2916,7 +2916,7 @@
         <p:spPr>
           <a:xfrm>
             <a:off x="6519672" y="2606040"/>
-            <a:ext cx="4882896" cy="1051560"/>
+            <a:ext cx="4882896" cy="1033272"/>
           </a:xfrm>
           <a:prstGeom prst="rect">
             <a:avLst/>
@@ -5153,7 +5153,7 @@
         </p:nvSpPr>
         <p:spPr>
           <a:xfrm>
-            <a:off x="594360" y="2560320"/>
+            <a:off x="594360" y="2496312"/>
             <a:ext cx="2377440" cy="274320"/>
           </a:xfrm>
           <a:prstGeom prst="rect">
@@ -5192,7 +5192,7 @@
         </p:nvSpPr>
         <p:spPr>
           <a:xfrm>
-            <a:off x="3063240" y="2532888"/>
+            <a:off x="3063240" y="2468880"/>
             <a:ext cx="8534095" cy="777240"/>
           </a:xfrm>
           <a:prstGeom prst="rect">
@@ -5234,7 +5234,7 @@
         </p:nvSpPr>
         <p:spPr>
           <a:xfrm>
-            <a:off x="594360" y="3337560"/>
+            <a:off x="594360" y="3209544"/>
             <a:ext cx="2377440" cy="274320"/>
           </a:xfrm>
           <a:prstGeom prst="rect">
@@ -5273,7 +5273,7 @@
         </p:nvSpPr>
         <p:spPr>
           <a:xfrm>
-            <a:off x="3063240" y="3310128"/>
+            <a:off x="3063240" y="3182112"/>
             <a:ext cx="8534095" cy="777240"/>
           </a:xfrm>
           <a:prstGeom prst="rect">
@@ -5315,7 +5315,7 @@
         </p:nvSpPr>
         <p:spPr>
           <a:xfrm>
-            <a:off x="594360" y="4114800"/>
+            <a:off x="594360" y="3922776"/>
             <a:ext cx="2377440" cy="274320"/>
           </a:xfrm>
           <a:prstGeom prst="rect">
@@ -5354,7 +5354,7 @@
         </p:nvSpPr>
         <p:spPr>
           <a:xfrm>
-            <a:off x="3063240" y="4087368"/>
+            <a:off x="3063240" y="3895344"/>
             <a:ext cx="8534095" cy="777240"/>
           </a:xfrm>
           <a:prstGeom prst="rect">
@@ -5396,7 +5396,7 @@
         </p:nvSpPr>
         <p:spPr>
           <a:xfrm>
-            <a:off x="594360" y="4892040"/>
+            <a:off x="594360" y="4636008"/>
             <a:ext cx="2377440" cy="274320"/>
           </a:xfrm>
           <a:prstGeom prst="rect">
@@ -5435,7 +5435,7 @@
         </p:nvSpPr>
         <p:spPr>
           <a:xfrm>
-            <a:off x="3063240" y="4864608"/>
+            <a:off x="3063240" y="4608576"/>
             <a:ext cx="8534095" cy="777240"/>
           </a:xfrm>
           <a:prstGeom prst="rect">
@@ -5477,7 +5477,7 @@
         </p:nvSpPr>
         <p:spPr>
           <a:xfrm>
-            <a:off x="594360" y="5669280"/>
+            <a:off x="594360" y="5349240"/>
             <a:ext cx="2377440" cy="274320"/>
           </a:xfrm>
           <a:prstGeom prst="rect">
@@ -5516,7 +5516,7 @@
         </p:nvSpPr>
         <p:spPr>
           <a:xfrm>
-            <a:off x="3063240" y="5641848"/>
+            <a:off x="3063240" y="5321808"/>
             <a:ext cx="8534095" cy="777240"/>
           </a:xfrm>
           <a:prstGeom prst="rect">
@@ -5558,8 +5558,8 @@
         </p:nvSpPr>
         <p:spPr>
           <a:xfrm>
-            <a:off x="594360" y="5989320"/>
-            <a:ext cx="11002975" cy="365760"/>
+            <a:off x="594360" y="6126480"/>
+            <a:ext cx="11002975" cy="320040"/>
           </a:xfrm>
           <a:prstGeom prst="rect">
             <a:avLst/>

--- a/slides/Chapter 03 - Federalism (Lecture Deck).pptx
+++ b/slides/Chapter 03 - Federalism (Lecture Deck).pptx
@@ -3596,12 +3596,12 @@
         </p:nvSpPr>
         <p:spPr>
           <a:xfrm>
-            <a:off x="594360" y="5687568"/>
-            <a:ext cx="11002975" cy="713232"/>
+            <a:off x="594360" y="5650992"/>
+            <a:ext cx="11002975" cy="749808"/>
           </a:xfrm>
           <a:prstGeom prst="roundRect">
             <a:avLst>
-              <a:gd name="adj" fmla="val 8974"/>
+              <a:gd name="adj" fmla="val 8537"/>
             </a:avLst>
           </a:prstGeom>
           <a:solidFill>
@@ -3623,7 +3623,7 @@
         </p:nvSpPr>
         <p:spPr>
           <a:xfrm>
-            <a:off x="868680" y="5852160"/>
+            <a:off x="868680" y="5815584"/>
             <a:ext cx="10454335" cy="329184"/>
           </a:xfrm>
           <a:prstGeom prst="rect">
@@ -3662,8 +3662,8 @@
         </p:nvSpPr>
         <p:spPr>
           <a:xfrm>
-            <a:off x="868680" y="6217920"/>
-            <a:ext cx="10454335" cy="0"/>
+            <a:off x="868680" y="6181344"/>
+            <a:ext cx="10454335" cy="201168"/>
           </a:xfrm>
           <a:prstGeom prst="rect">
             <a:avLst/>
@@ -8625,7 +8625,7 @@
         <p:spPr>
           <a:xfrm>
             <a:off x="868680" y="5696712"/>
-            <a:ext cx="10454335" cy="155448"/>
+            <a:ext cx="10454335" cy="201168"/>
           </a:xfrm>
           <a:prstGeom prst="rect">
             <a:avLst/>

--- a/slides/Chapter 03 - Federalism (Lecture Deck).pptx
+++ b/slides/Chapter 03 - Federalism (Lecture Deck).pptx
@@ -716,7 +716,11 @@
               <a:rPr lang="en-US" dirty="0"/>
               <a:t>TIMING: 6 minutes.
 CHECK CURRENCY BEFORE TEACHING. Immigration litigation in particular moves fast.
-Confirm the posture of any case you plan to discuss.
+Confirm the posture of any case you plan to discuss. As of October 2026: the en
+banc Fifth Circuit (10-7, April 24, 2026) vacated the injunction against SB 4 for
+lack of standing; a panel stayed a second injunction on May 29, 2026; SB 4 is
+enforceable and the merits remain undecided (LML v. Martin; La Union del Pueblo
+Entero v. Abbott).
 THE CLOSING BOX IS THE MOST IMPORTANT LINE ON THIS SLIDE. State attorneys general
 of both parties sue Washington far more when the opposing party holds the
 presidency. California sued repeatedly during one administration; Texas during
@@ -1012,8 +1016,9 @@
 federal funds in the state budget. It turns an abstract argument about
 intergovernmental relations into a number students can see, and it pairs well
 with Chapter 14.
-Oyez has audio for Gibbons and summaries for McCulloch. Hearing lawyers argue
-about the meaning of "commerce" makes the abstraction concrete.</a:t>
+Oyez has case summaries and the opinions for Gibbons and McCulloch; no argument
+audio exists before 1955. Reading Marshall's definition of "commerce" aloud
+makes the abstraction concrete.</a:t>
             </a:r>
             <a:endParaRPr lang="en-US" dirty="0"/>
           </a:p>
@@ -1489,8 +1494,9 @@
 the edges are where every real dispute lives.
 TRY THESE OUT LOUD:
   "Who regulates marijuana?" Reserved to states, except federal law still
-  classifies it as a controlled substance, so growers cannot use national banks.
-  Both answers are correct, which is the lesson.
+  controls it (medical marijuana moved to Schedule III in 2026; the rest is
+  Schedule I), so most growers cannot use national banks. Both answers are
+  correct, which is the lesson.
   "Who controls elections?" States run them, but the Constitution and federal
   voting-rights law constrain how. Chapter 8.
   "Who handles a hurricane?" Concurrent, and the coordination failures in real
@@ -1690,8 +1696,9 @@
 attach conditions to highway money. States are technically free to refuse, and
 functionally never do. That is how Washington legislates in areas it does not
 control.
-THE TENSION IS REAL AND WORTH STATING NEUTRALLY. Texas receives roughly a third of
-its budget from Washington while frequently suing over federal requirements.
+THE TENSION IS REAL AND WORTH STATING NEUTRALLY. Texas receives roughly 30
+percent of its budget from Washington while frequently suing over federal
+requirements.
 Critics call that inconsistent. Defenders answer that accepting money is not
 consent to unlimited conditions, and that the same argument gets made by states of
 both parties depending on who holds the White House. Both positions are
@@ -3339,7 +3346,7 @@
                 <a:ea typeface="Calibri" pitchFamily="34" charset="-122"/>
                 <a:cs typeface="Calibri" pitchFamily="34" charset="-120"/>
               </a:rPr>
-              <a:t>Texas has tested the limits of state enforcement authority, including a 2023 law making unlawful entry a state crime. Courts have weighed it against federal primacy over immigration.</a:t>
+              <a:t>Texas has tested the limits of state enforcement authority with SB 4, a 2023 law making unlawful entry a state crime. Blocked in court for two years, it took effect in May 2026 after the full Fifth Circuit dismissed the challenge on standing grounds without deciding whether federal law preempts it. New suits are pending.</a:t>
             </a:r>
             <a:endParaRPr lang="en-US" sz="1250" dirty="0"/>
           </a:p>
@@ -3582,7 +3589,7 @@
                 <a:ea typeface="Calibri" pitchFamily="34" charset="-122"/>
                 <a:cs typeface="Calibri" pitchFamily="34" charset="-120"/>
               </a:rPr>
-              <a:t>Reserved to the states in practice, yet still a federally controlled substance, which keeps the industry out of national banking.</a:t>
+              <a:t>Reserved to the states in practice, yet still federally controlled: in April 2026 DEA moved state-licensed medical marijuana to Schedule III, but recreational marijuana stays in Schedule I, which keeps much of the industry out of national banking.</a:t>
             </a:r>
             <a:endParaRPr lang="en-US" sz="1250" dirty="0"/>
           </a:p>
@@ -10010,7 +10017,7 @@
                 <a:ea typeface="Cambria" pitchFamily="34" charset="-122"/>
                 <a:cs typeface="Cambria" pitchFamily="34" charset="-120"/>
               </a:rPr>
-              <a:t>~1/3</a:t>
+              <a:t>~30%</a:t>
             </a:r>
             <a:endParaRPr lang="en-US" sz="4600" dirty="0"/>
           </a:p>
@@ -10052,7 +10059,7 @@
                 <a:ea typeface="Calibri" pitchFamily="34" charset="-122"/>
                 <a:cs typeface="Calibri" pitchFamily="34" charset="-120"/>
               </a:rPr>
-              <a:t>of the Texas state budget comes from federal funds. Texas both depends on that money and regularly litigates against the conditions attached to it.</a:t>
+              <a:t>of the Texas state budget comes from federal funds: $100.9 billion of $338.0 billion in 2026-27. Texas both depends on that money and regularly litigates against the conditions attached to it.</a:t>
             </a:r>
             <a:endParaRPr lang="en-US" sz="1300" dirty="0"/>
           </a:p>
@@ -10364,7 +10371,7 @@
                 <a:ea typeface="Calibri" pitchFamily="34" charset="-122"/>
                 <a:cs typeface="Calibri" pitchFamily="34" charset="-120"/>
               </a:rPr>
-              <a:t>Texas receives roughly a third of its budget from the federal government and regularly sues over federal requirements. Is that inconsistent, or is accepting money different from consenting to conditions?</a:t>
+              <a:t>Texas receives roughly 30 percent of its budget from the federal government and regularly sues over federal requirements. Is that inconsistent, or is accepting money different from consenting to conditions?</a:t>
             </a:r>
             <a:endParaRPr lang="en-US" sz="1600" dirty="0"/>
           </a:p>
@@ -10719,7 +10726,7 @@
                 <a:ea typeface="Cambria" pitchFamily="34" charset="-122"/>
                 <a:cs typeface="Cambria" pitchFamily="34" charset="-120"/>
               </a:rPr>
-              <a:t>1789 to 1930s</a:t>
+              <a:t>1870s to 1930s</a:t>
             </a:r>
             <a:endParaRPr lang="en-US" sz="2200" dirty="0"/>
           </a:p>

--- a/slides/Chapter 03 - Federalism (Lecture Deck).pptx
+++ b/slides/Chapter 03 - Federalism (Lecture Deck).pptx
@@ -1905,7 +1905,10 @@
 DO NOT PRESENT THIS AS PROGRESS TOWARD A CORRECT ANSWER. It is a pendulum, and
 which direction counts as improvement is a value judgment. After September 11 the
 federal government recentralized authority in homeland security even during the
-new federalism era. The trend line is not clean.</a:t>
+new federalism era. The trend line is not clean.
+PERIODIZATION NOTE: the 1870s start date follows OpenStax, the base text. Many
+Texas Government textbooks date dual federalism from 1789; say which convention
+you are using if students have seen the other.</a:t>
             </a:r>
             <a:endParaRPr lang="en-US" dirty="0"/>
           </a:p>
